--- a/curso/pptx/S75.pptx
+++ b/curso/pptx/S75.pptx
@@ -5295,7 +5295,7 @@
                 </a:solidFill>
                 <a:latin typeface="Nunito Sans"/>
               </a:rPr>
-              <a:t>Nombrar:</a:t>
+              <a:t>说出来：</a:t>
             </a:r>
             <a:r>
               <a:rPr sz="2800" b="0">
@@ -5304,7 +5304,7 @@
                 </a:solidFill>
                 <a:latin typeface="Nunito Sans"/>
               </a:rPr>
-              <a:t> «Estoy enfadado». Ponerle nombre ya ayuda a pensar.</a:t>
+              <a:t>“我很生气。”给它起个名字，就已经有助于思考了。</a:t>
             </a:r>
           </a:p>
           <a:p>
@@ -5329,7 +5329,7 @@
                 </a:solidFill>
                 <a:latin typeface="Nunito Sans"/>
               </a:rPr>
-              <a:t>Esperar:</a:t>
+              <a:t>等一等：</a:t>
             </a:r>
             <a:r>
               <a:rPr sz="2800" b="0">
@@ -5338,7 +5338,7 @@
                 </a:solidFill>
                 <a:latin typeface="Nunito Sans"/>
               </a:rPr>
-              <a:t> no enviar, no contestar, no decidir todavía.</a:t>
+              <a:t>先不发，先不回，先不做决定。</a:t>
             </a:r>
           </a:p>
           <a:p>
@@ -5363,7 +5363,7 @@
                 </a:solidFill>
                 <a:latin typeface="Nunito Sans"/>
               </a:rPr>
-              <a:t>Preguntar:</a:t>
+              <a:t>提问：</a:t>
             </a:r>
             <a:r>
               <a:rPr sz="2800" b="0">
@@ -5372,7 +5372,7 @@
                 </a:solidFill>
                 <a:latin typeface="Nunito Sans"/>
               </a:rPr>
-              <a:t> ¿qué idea me hago? ¿Cómo lo sé? ¿Hay otra explicación?</a:t>
+              <a:t>我有什么想法？我怎么知道？还有别的解释吗？</a:t>
             </a:r>
           </a:p>
         </p:txBody>
@@ -7157,7 +7157,7 @@
                 </a:solidFill>
                 <a:latin typeface="Nunito Sans"/>
               </a:rPr>
-              <a:t>Aparece </a:t>
+              <a:t>它是</a:t>
             </a:r>
             <a:r>
               <a:rPr sz="2800" b="1">
@@ -7166,7 +7166,7 @@
                 </a:solidFill>
                 <a:latin typeface="Nunito Sans"/>
               </a:rPr>
-              <a:t>sola</a:t>
+              <a:t>自己</a:t>
             </a:r>
             <a:r>
               <a:rPr sz="2800" b="0">
@@ -7175,7 +7175,7 @@
                 </a:solidFill>
                 <a:latin typeface="Nunito Sans"/>
               </a:rPr>
-              <a:t>: no la elegimos</a:t>
+              <a:t>出现的：我们不能选择它</a:t>
             </a:r>
           </a:p>
           <a:p>
@@ -7200,7 +7200,7 @@
                 </a:solidFill>
                 <a:latin typeface="Nunito Sans"/>
               </a:rPr>
-              <a:t>Dura </a:t>
+              <a:t>它持续</a:t>
             </a:r>
             <a:r>
               <a:rPr sz="2800" b="1">
@@ -7209,7 +7209,7 @@
                 </a:solidFill>
                 <a:latin typeface="Nunito Sans"/>
               </a:rPr>
-              <a:t>poco</a:t>
+              <a:t>很短</a:t>
             </a:r>
             <a:r>
               <a:rPr sz="2800" b="0">
@@ -7218,7 +7218,7 @@
                 </a:solidFill>
                 <a:latin typeface="Nunito Sans"/>
               </a:rPr>
-              <a:t>: segundos o minutos</a:t>
+              <a:t>：几秒钟或几分钟</a:t>
             </a:r>
           </a:p>
           <a:p>
@@ -7243,7 +7243,7 @@
                 </a:solidFill>
                 <a:latin typeface="Nunito Sans"/>
               </a:rPr>
-              <a:t>Se nota en el </a:t>
+              <a:t>它会在</a:t>
             </a:r>
             <a:r>
               <a:rPr sz="2800" b="1">
@@ -7252,7 +7252,7 @@
                 </a:solidFill>
                 <a:latin typeface="Nunito Sans"/>
               </a:rPr>
-              <a:t>cuerpo</a:t>
+              <a:t>身体</a:t>
             </a:r>
             <a:r>
               <a:rPr sz="2800" b="0">
@@ -7261,7 +7261,7 @@
                 </a:solidFill>
                 <a:latin typeface="Nunito Sans"/>
               </a:rPr>
-              <a:t>: corazón, cara, estómago</a:t>
+              <a:t>上体现出来：心跳、脸、胃</a:t>
             </a:r>
           </a:p>
         </p:txBody>
@@ -8369,7 +8369,7 @@
                 </a:solidFill>
                 <a:latin typeface="Nunito Sans"/>
               </a:rPr>
-              <a:t>Buenas o malas</a:t>
+              <a:t>好的或坏的</a:t>
             </a:r>
           </a:p>
           <a:p>
@@ -8394,7 +8394,7 @@
                 </a:solidFill>
                 <a:latin typeface="Nunito Sans"/>
               </a:rPr>
-              <a:t>Órdenes que hay que obedecer</a:t>
+              <a:t>必须服从的命令</a:t>
             </a:r>
           </a:p>
           <a:p>
@@ -8419,7 +8419,7 @@
                 </a:solidFill>
                 <a:latin typeface="Nunito Sans"/>
               </a:rPr>
-              <a:t>Siempre verdad</a:t>
+              <a:t>总是真的</a:t>
             </a:r>
           </a:p>
         </p:txBody>
@@ -8549,7 +8549,7 @@
                 </a:solidFill>
                 <a:latin typeface="Nunito Sans"/>
               </a:rPr>
-              <a:t>Agradables o desagradables</a:t>
+              <a:t>让人舒服的或不舒服的</a:t>
             </a:r>
           </a:p>
           <a:p>
@@ -8568,31 +8568,22 @@
               <a:t>• </a:t>
             </a:r>
             <a:r>
+              <a:rPr sz="2600" b="1">
+                <a:solidFill>
+                  <a:srgbClr val="1F2A44"/>
+                </a:solidFill>
+                <a:latin typeface="Nunito Sans"/>
+              </a:rPr>
+              <a:t>告知</a:t>
+            </a:r>
+            <a:r>
               <a:rPr sz="2600" b="0">
                 <a:solidFill>
                   <a:srgbClr val="1F2A44"/>
                 </a:solidFill>
                 <a:latin typeface="Nunito Sans"/>
               </a:rPr>
-              <a:t>Señales que </a:t>
-            </a:r>
-            <a:r>
-              <a:rPr sz="2600" b="1">
-                <a:solidFill>
-                  <a:srgbClr val="1F2A44"/>
-                </a:solidFill>
-                <a:latin typeface="Nunito Sans"/>
-              </a:rPr>
-              <a:t>informan</a:t>
-            </a:r>
-            <a:r>
-              <a:rPr sz="2600" b="0">
-                <a:solidFill>
-                  <a:srgbClr val="1F2A44"/>
-                </a:solidFill>
-                <a:latin typeface="Nunito Sans"/>
-              </a:rPr>
-              <a:t> de lo que me importa</a:t>
+              <a:t>我什么对我重要的信号</a:t>
             </a:r>
           </a:p>
           <a:p>
@@ -8617,7 +8608,7 @@
                 </a:solidFill>
                 <a:latin typeface="Nunito Sans"/>
               </a:rPr>
-              <a:t>Una pista que hay que comprobar: «¿cómo lo sé?»</a:t>
+              <a:t>一条需要核实的线索：“我怎么知道？”</a:t>
             </a:r>
           </a:p>
         </p:txBody>

--- a/curso/pptx/S75.pptx
+++ b/curso/pptx/S75.pptx
@@ -4234,7 +4234,7 @@
                 </a:solidFill>
                 <a:latin typeface="Nunito Sans"/>
               </a:rPr>
-              <a:t>奈亚拉想：“蕾尔不理我”，然后生气了。一个小时后，蕾尔写道：“对不起，我在地铁里手机没电了。”</a:t>
+              <a:t>一个女孩想：“另一个女孩不理我”，然后生气了。一个小时后，另一个女孩写道：“对不起，我在地铁里手机没电了。”</a:t>
             </a:r>
           </a:p>
         </p:txBody>
@@ -4282,7 +4282,7 @@
                 </a:solidFill>
                 <a:latin typeface="Nunito Sans"/>
               </a:rPr>
-              <a:t>发生了什么？蕾尔读了消息，没有回。</a:t>
+              <a:t>发生了什么？另一个女孩读了消息，没有回。</a:t>
             </a:r>
           </a:p>
           <a:p>
@@ -4307,7 +4307,7 @@
                 </a:solidFill>
                 <a:latin typeface="Nunito Sans"/>
               </a:rPr>
-              <a:t>奈亚拉有什么想法？“她不理我。”这个想法引出了生气。</a:t>
+              <a:t>这个女孩有什么想法？“她不理我。”这个想法引出了生气。</a:t>
             </a:r>
           </a:p>
           <a:p>
@@ -4543,7 +4543,7 @@
                 </a:solidFill>
                 <a:latin typeface="Nunito Sans"/>
               </a:rPr>
-              <a:t>在毕尔巴鄂大节上，艾托尔无意中推了伊克尔一下，伊克尔的三明治掉了。伊克尔气坏了，当着所有人的面骂了他一句。</a:t>
+              <a:t>在毕尔巴鄂大节上，一个男孩无意中推了一个同学一下，这个同学的三明治掉了。这个同学气坏了，当着所有人的面骂了他一句。</a:t>
             </a:r>
           </a:p>
         </p:txBody>
@@ -4852,7 +4852,7 @@
                 </a:solidFill>
                 <a:latin typeface="Nunito Sans"/>
               </a:rPr>
-              <a:t>凯文在操场上推了奥马尔。后来他解释说：“我当时很生气。而且我们在课上说过情绪没有好坏。”</a:t>
+              <a:t>一个男孩在操场上推了一个同学。后来他解释说：“我当时很生气。而且我们在课上说过情绪没有好坏。”</a:t>
             </a:r>
           </a:p>
         </p:txBody>
@@ -4900,7 +4900,7 @@
                 </a:solidFill>
                 <a:latin typeface="Nunito Sans"/>
               </a:rPr>
-              <a:t>如果情绪没有好坏，那凯文就没有做错什么吗？</a:t>
+              <a:t>如果情绪没有好坏，那这个男孩就没有做错什么吗？</a:t>
             </a:r>
           </a:p>
           <a:p>
@@ -4925,7 +4925,7 @@
                 </a:solidFill>
                 <a:latin typeface="Nunito Sans"/>
               </a:rPr>
-              <a:t>看起来凯文说得对：我们说过生气并不坏。</a:t>
+              <a:t>看起来这个男孩说得对：我们说过生气并不坏。</a:t>
             </a:r>
           </a:p>
           <a:p>
@@ -4950,7 +4950,7 @@
                 </a:solidFill>
                 <a:latin typeface="Nunito Sans"/>
               </a:rPr>
-              <a:t>但凯文不只是感受：他推了人。这是一种行为。</a:t>
+              <a:t>但这个男孩不只是感受：他推了人。这是一种行为。</a:t>
             </a:r>
           </a:p>
           <a:p>
@@ -6780,7 +6780,7 @@
                 </a:solidFill>
                 <a:latin typeface="Nunito Sans"/>
               </a:rPr>
-              <a:t>奈亚拉看到蕾尔一个小时前就读了她的消息，却没有回。她生气了。她写下“好吧，你别理我”，然后发了出去。</a:t>
+              <a:t>一个女孩看到另一个女孩一个小时前就读了她的消息，却没有回。她生气了。她写下“好吧，你别理我”，然后发了出去。</a:t>
             </a:r>
           </a:p>
         </p:txBody>
@@ -6819,7 +6819,7 @@
                 </a:solidFill>
                 <a:latin typeface="Nunito Sans"/>
               </a:rPr>
-              <a:t>奈亚拉感受到了什么？她有理由这样感受吗？</a:t>
+              <a:t>这个女孩感受到了什么？她有理由这样感受吗？</a:t>
             </a:r>
           </a:p>
         </p:txBody>
